--- a/ゲーム科1年/00_前期/プログラミングⅡ/17_関数ポインタ.pptx
+++ b/ゲーム科1年/00_前期/プログラミングⅡ/17_関数ポインタ.pptx
@@ -4876,7 +4876,7 @@
           <a:p>
             <a:r>
               <a:rPr lang="ja-JP" altLang="en-US" sz="2400" dirty="0"/>
-              <a:t>ゲームではよく当たった後の処理などで使われます。</a:t>
+              <a:t>ゲームではよく当たり判定の処理などで使われます。</a:t>
             </a:r>
             <a:endParaRPr lang="en-US" altLang="ja-JP" sz="2400" dirty="0"/>
           </a:p>
@@ -5433,10 +5433,10 @@
       </p:sp>
       <p:pic>
         <p:nvPicPr>
-          <p:cNvPr id="6" name="図 5">
-            <a:extLst>
-              <a:ext uri="{FF2B5EF4-FFF2-40B4-BE49-F238E27FC236}">
-                <a16:creationId xmlns:a16="http://schemas.microsoft.com/office/drawing/2014/main" id="{84A580DE-ABDB-435A-B9FB-BAF92D1EF0C8}"/>
+          <p:cNvPr id="3" name="図 2">
+            <a:extLst>
+              <a:ext uri="{FF2B5EF4-FFF2-40B4-BE49-F238E27FC236}">
+                <a16:creationId xmlns:a16="http://schemas.microsoft.com/office/drawing/2014/main" id="{76479ED2-4C37-4BD3-8938-07AEAB489698}"/>
               </a:ext>
             </a:extLst>
           </p:cNvPr>
@@ -5453,8 +5453,8 @@
         </p:blipFill>
         <p:spPr>
           <a:xfrm>
-            <a:off x="567542" y="1763258"/>
-            <a:ext cx="5768694" cy="4747609"/>
+            <a:off x="633494" y="1763258"/>
+            <a:ext cx="5734974" cy="4679875"/>
           </a:xfrm>
           <a:prstGeom prst="rect">
             <a:avLst/>

--- a/ゲーム科1年/00_前期/プログラミングⅡ/17_関数ポインタ.pptx
+++ b/ゲーム科1年/00_前期/プログラミングⅡ/17_関数ポインタ.pptx
@@ -273,7 +273,7 @@
           <a:p>
             <a:fld id="{E9CC885B-4903-4D54-9A93-00025F12DED9}" type="datetimeFigureOut">
               <a:rPr kumimoji="1" lang="ja-JP" altLang="en-US" smtClean="0"/>
-              <a:t>2026/3/3</a:t>
+              <a:t>2026/5/13</a:t>
             </a:fld>
             <a:endParaRPr kumimoji="1" lang="ja-JP" altLang="en-US"/>
           </a:p>
@@ -503,7 +503,7 @@
           <a:p>
             <a:fld id="{E9CC885B-4903-4D54-9A93-00025F12DED9}" type="datetimeFigureOut">
               <a:rPr kumimoji="1" lang="ja-JP" altLang="en-US" smtClean="0"/>
-              <a:t>2026/3/3</a:t>
+              <a:t>2026/5/13</a:t>
             </a:fld>
             <a:endParaRPr kumimoji="1" lang="ja-JP" altLang="en-US"/>
           </a:p>
@@ -743,7 +743,7 @@
           <a:p>
             <a:fld id="{E9CC885B-4903-4D54-9A93-00025F12DED9}" type="datetimeFigureOut">
               <a:rPr kumimoji="1" lang="ja-JP" altLang="en-US" smtClean="0"/>
-              <a:t>2026/3/3</a:t>
+              <a:t>2026/5/13</a:t>
             </a:fld>
             <a:endParaRPr kumimoji="1" lang="ja-JP" altLang="en-US"/>
           </a:p>
@@ -973,7 +973,7 @@
           <a:p>
             <a:fld id="{E9CC885B-4903-4D54-9A93-00025F12DED9}" type="datetimeFigureOut">
               <a:rPr kumimoji="1" lang="ja-JP" altLang="en-US" smtClean="0"/>
-              <a:t>2026/3/3</a:t>
+              <a:t>2026/5/13</a:t>
             </a:fld>
             <a:endParaRPr kumimoji="1" lang="ja-JP" altLang="en-US"/>
           </a:p>
@@ -1248,7 +1248,7 @@
           <a:p>
             <a:fld id="{E9CC885B-4903-4D54-9A93-00025F12DED9}" type="datetimeFigureOut">
               <a:rPr kumimoji="1" lang="ja-JP" altLang="en-US" smtClean="0"/>
-              <a:t>2026/3/3</a:t>
+              <a:t>2026/5/13</a:t>
             </a:fld>
             <a:endParaRPr kumimoji="1" lang="ja-JP" altLang="en-US"/>
           </a:p>
@@ -1577,7 +1577,7 @@
           <a:p>
             <a:fld id="{E9CC885B-4903-4D54-9A93-00025F12DED9}" type="datetimeFigureOut">
               <a:rPr kumimoji="1" lang="ja-JP" altLang="en-US" smtClean="0"/>
-              <a:t>2026/3/3</a:t>
+              <a:t>2026/5/13</a:t>
             </a:fld>
             <a:endParaRPr kumimoji="1" lang="ja-JP" altLang="en-US"/>
           </a:p>
@@ -2053,7 +2053,7 @@
           <a:p>
             <a:fld id="{E9CC885B-4903-4D54-9A93-00025F12DED9}" type="datetimeFigureOut">
               <a:rPr kumimoji="1" lang="ja-JP" altLang="en-US" smtClean="0"/>
-              <a:t>2026/3/3</a:t>
+              <a:t>2026/5/13</a:t>
             </a:fld>
             <a:endParaRPr kumimoji="1" lang="ja-JP" altLang="en-US"/>
           </a:p>
@@ -2194,7 +2194,7 @@
           <a:p>
             <a:fld id="{E9CC885B-4903-4D54-9A93-00025F12DED9}" type="datetimeFigureOut">
               <a:rPr kumimoji="1" lang="ja-JP" altLang="en-US" smtClean="0"/>
-              <a:t>2026/3/3</a:t>
+              <a:t>2026/5/13</a:t>
             </a:fld>
             <a:endParaRPr kumimoji="1" lang="ja-JP" altLang="en-US"/>
           </a:p>
@@ -2307,7 +2307,7 @@
           <a:p>
             <a:fld id="{E9CC885B-4903-4D54-9A93-00025F12DED9}" type="datetimeFigureOut">
               <a:rPr kumimoji="1" lang="ja-JP" altLang="en-US" smtClean="0"/>
-              <a:t>2026/3/3</a:t>
+              <a:t>2026/5/13</a:t>
             </a:fld>
             <a:endParaRPr kumimoji="1" lang="ja-JP" altLang="en-US"/>
           </a:p>
@@ -2650,7 +2650,7 @@
           <a:p>
             <a:fld id="{E9CC885B-4903-4D54-9A93-00025F12DED9}" type="datetimeFigureOut">
               <a:rPr kumimoji="1" lang="ja-JP" altLang="en-US" smtClean="0"/>
-              <a:t>2026/3/3</a:t>
+              <a:t>2026/5/13</a:t>
             </a:fld>
             <a:endParaRPr kumimoji="1" lang="ja-JP" altLang="en-US"/>
           </a:p>
@@ -2938,7 +2938,7 @@
           <a:p>
             <a:fld id="{E9CC885B-4903-4D54-9A93-00025F12DED9}" type="datetimeFigureOut">
               <a:rPr kumimoji="1" lang="ja-JP" altLang="en-US" smtClean="0"/>
-              <a:t>2026/3/3</a:t>
+              <a:t>2026/5/13</a:t>
             </a:fld>
             <a:endParaRPr kumimoji="1" lang="ja-JP" altLang="en-US"/>
           </a:p>
@@ -3211,7 +3211,7 @@
           <a:p>
             <a:fld id="{E9CC885B-4903-4D54-9A93-00025F12DED9}" type="datetimeFigureOut">
               <a:rPr kumimoji="1" lang="ja-JP" altLang="en-US" smtClean="0"/>
-              <a:t>2026/3/3</a:t>
+              <a:t>2026/5/13</a:t>
             </a:fld>
             <a:endParaRPr kumimoji="1" lang="ja-JP" altLang="en-US"/>
           </a:p>
@@ -6520,7 +6520,7 @@
                   <a:srgbClr val="FF0000"/>
                 </a:solidFill>
               </a:rPr>
-              <a:t>分の短縮</a:t>
+              <a:t>文の短縮</a:t>
             </a:r>
             <a:r>
               <a:rPr lang="ja-JP" altLang="en-US" sz="2400" dirty="0"/>
